--- a/3-clang-llvm/lec8-building-Clang-analyzer-v3.pptx
+++ b/3-clang-llvm/lec8-building-Clang-analyzer-v3.pptx
@@ -188,20 +188,6 @@
 
 <file path=ppt/comments/comment1.xml><?xml version="1.0" encoding="utf-8"?>
 <p:cmLst xmlns:a="http://schemas.openxmlformats.org/drawingml/2006/main" xmlns:r="http://schemas.openxmlformats.org/officeDocument/2006/relationships" xmlns:p="http://schemas.openxmlformats.org/presentationml/2006/main">
-  <p:cm authorId="1" dt="2022-08-24T11:49:49.412" idx="3">
-    <p:pos x="4244" y="903"/>
-    <p:text>function name changed</p:text>
-    <p:extLst>
-      <p:ext uri="{C676402C-5697-4E1C-873F-D02D1690AC5C}">
-        <p15:threadingInfo xmlns:p15="http://schemas.microsoft.com/office/powerpoint/2012/main" timeZoneBias="-540"/>
-      </p:ext>
-    </p:extLst>
-  </p:cm>
-</p:cmLst>
-</file>
-
-<file path=ppt/comments/comment2.xml><?xml version="1.0" encoding="utf-8"?>
-<p:cmLst xmlns:a="http://schemas.openxmlformats.org/drawingml/2006/main" xmlns:r="http://schemas.openxmlformats.org/officeDocument/2006/relationships" xmlns:p="http://schemas.openxmlformats.org/presentationml/2006/main">
   <p:cm authorId="1" dt="2022-08-24T12:19:56.202" idx="5">
     <p:pos x="2598" y="2155"/>
     <p:text>function name change</p:text>
@@ -214,21 +200,7 @@
 </p:cmLst>
 </file>
 
-<file path=ppt/comments/comment3.xml><?xml version="1.0" encoding="utf-8"?>
-<p:cmLst xmlns:a="http://schemas.openxmlformats.org/drawingml/2006/main" xmlns:r="http://schemas.openxmlformats.org/officeDocument/2006/relationships" xmlns:p="http://schemas.openxmlformats.org/presentationml/2006/main">
-  <p:cm authorId="1" dt="2022-08-24T12:21:28.238" idx="6">
-    <p:pos x="4088" y="396"/>
-    <p:text>function name change</p:text>
-    <p:extLst>
-      <p:ext uri="{C676402C-5697-4E1C-873F-D02D1690AC5C}">
-        <p15:threadingInfo xmlns:p15="http://schemas.microsoft.com/office/powerpoint/2012/main" timeZoneBias="-540"/>
-      </p:ext>
-    </p:extLst>
-  </p:cm>
-</p:cmLst>
-</file>
-
-<file path=ppt/comments/comment4.xml><?xml version="1.0" encoding="utf-8"?>
+<file path=ppt/comments/comment2.xml><?xml version="1.0" encoding="utf-8"?>
 <p:cmLst xmlns:a="http://schemas.openxmlformats.org/drawingml/2006/main" xmlns:r="http://schemas.openxmlformats.org/officeDocument/2006/relationships" xmlns:p="http://schemas.openxmlformats.org/presentationml/2006/main">
   <p:cm authorId="1" dt="2022-08-24T13:58:58.832" idx="9">
     <p:pos x="3160" y="3098"/>
@@ -242,7 +214,7 @@
 </p:cmLst>
 </file>
 
-<file path=ppt/comments/comment5.xml><?xml version="1.0" encoding="utf-8"?>
+<file path=ppt/comments/comment3.xml><?xml version="1.0" encoding="utf-8"?>
 <p:cmLst xmlns:a="http://schemas.openxmlformats.org/drawingml/2006/main" xmlns:r="http://schemas.openxmlformats.org/officeDocument/2006/relationships" xmlns:p="http://schemas.openxmlformats.org/presentationml/2006/main">
   <p:cm authorId="1" dt="2022-08-24T13:59:39.618" idx="10">
     <p:pos x="4204" y="1075"/>
@@ -338,7 +310,7 @@
           <a:p>
             <a:fld id="{36874A5F-5CDF-4C57-8728-FAD009E40212}" type="datetimeFigureOut">
               <a:rPr lang="en-US" smtClean="0"/>
-              <a:t>9/22/2022</a:t>
+              <a:t>9/22/2026</a:t>
             </a:fld>
             <a:endParaRPr lang="en-US"/>
           </a:p>
@@ -503,7 +475,7 @@
           <a:p>
             <a:fld id="{66519C4B-957B-48D8-9FA5-433F329C300C}" type="datetimeFigureOut">
               <a:rPr lang="ko-KR" altLang="en-US" smtClean="0"/>
-              <a:t>2022-09-22</a:t>
+              <a:t>2026-09-22</a:t>
             </a:fld>
             <a:endParaRPr lang="ko-KR" altLang="en-US" dirty="0"/>
           </a:p>
@@ -1552,15 +1524,15 @@
           <a:p>
             <a:r>
               <a:rPr lang="en-US" altLang="ko-KR" dirty="0"/>
-              <a:t>How to build a program analysis tool </a:t>
+              <a:t>How to build a program analysis tool using Clang/</a:t>
             </a:r>
             <a:r>
               <a:rPr lang="en-US" altLang="ko-KR"/>
-              <a:t>using Clang/LLVM </a:t>
+              <a:t>LLVM </a:t>
             </a:r>
             <a:r>
               <a:rPr lang="en-US" altLang="ko-KR" b="1"/>
-              <a:t>13.0.1</a:t>
+              <a:t>20.0.1</a:t>
             </a:r>
             <a:endParaRPr lang="ko-KR" altLang="en-US" b="1" dirty="0"/>
           </a:p>
@@ -9615,14 +9587,10 @@
             <a:pPr lvl="2"/>
             <a:r>
               <a:rPr lang="en-US" altLang="ko-KR" dirty="0"/>
-              <a:t>Ex</a:t>
-            </a:r>
-            <a:r>
-              <a:rPr lang="en-US" altLang="ko-KR"/>
-              <a:t>) </a:t>
-            </a:r>
-            <a:r>
-              <a:rPr lang="en-US" altLang="ko-KR">
+              <a:t>Ex) </a:t>
+            </a:r>
+            <a:r>
+              <a:rPr lang="en-US" altLang="ko-KR" dirty="0" err="1">
                 <a:latin typeface="Consolas" panose="020B0609020204030204" pitchFamily="49" charset="0"/>
                 <a:cs typeface="Consolas" panose="020B0609020204030204" pitchFamily="49" charset="0"/>
               </a:rPr>
@@ -12793,18 +12761,42 @@
           <a:lstStyle/>
           <a:p>
             <a:r>
-              <a:rPr lang="en-US" altLang="ko-KR" sz="1400"/>
-              <a:t>Note. InsertText, InsertTextAfter, InsertTextbefore behaves differently when you apply multiple modifications to the same location.</a:t>
-            </a:r>
-          </a:p>
-          <a:p>
-            <a:r>
-              <a:rPr lang="en-US" altLang="ko-KR" sz="1400">
+              <a:rPr lang="en-US" altLang="ko-KR" sz="1400" dirty="0"/>
+              <a:t>Note. </a:t>
+            </a:r>
+            <a:r>
+              <a:rPr lang="en-US" altLang="ko-KR" sz="1400" dirty="0" err="1"/>
+              <a:t>InsertText</a:t>
+            </a:r>
+            <a:r>
+              <a:rPr lang="en-US" altLang="ko-KR" sz="1400" dirty="0"/>
+              <a:t>, </a:t>
+            </a:r>
+            <a:r>
+              <a:rPr lang="en-US" altLang="ko-KR" sz="1400" dirty="0" err="1"/>
+              <a:t>InsertTextAfter</a:t>
+            </a:r>
+            <a:r>
+              <a:rPr lang="en-US" altLang="ko-KR" sz="1400" dirty="0"/>
+              <a:t>, </a:t>
+            </a:r>
+            <a:r>
+              <a:rPr lang="en-US" altLang="ko-KR" sz="1400" dirty="0" err="1"/>
+              <a:t>InsertTextbefore</a:t>
+            </a:r>
+            <a:r>
+              <a:rPr lang="en-US" altLang="ko-KR" sz="1400" dirty="0"/>
+              <a:t> behaves differently when you apply multiple modifications to the same location.</a:t>
+            </a:r>
+          </a:p>
+          <a:p>
+            <a:r>
+              <a:rPr lang="en-US" altLang="ko-KR" sz="1400" dirty="0">
                 <a:hlinkClick r:id="rId2"/>
               </a:rPr>
               <a:t>https://clang.llvm.org/doxygen/classclang_1_1Rewriter.html#a5fd6f665d719a8f2dbd6a6e6b5e1436b</a:t>
             </a:r>
-            <a:endParaRPr lang="ko-KR" altLang="en-US" sz="1400"/>
+            <a:endParaRPr lang="ko-KR" altLang="en-US" sz="1400" dirty="0"/>
           </a:p>
         </p:txBody>
       </p:sp>
